--- a/exports/pptx/lessons/primary-module-02-panchabhuta/day-04-space.pptx
+++ b/exports/pptx/lessons/primary-module-02-panchabhuta/day-04-space.pptx
@@ -18,9 +18,11 @@
     <p:sldId id="266" r:id="rId12"/>
     <p:sldId id="267" r:id="rId13"/>
     <p:sldId id="268" r:id="rId14"/>
+    <p:sldId id="269" r:id="rId15"/>
+    <p:sldId id="270" r:id="rId16"/>
   </p:sldIdLst>
   <p:notesMasterIdLst>
-    <p:notesMasterId r:id="rId15"/>
+    <p:notesMasterId r:id="rId17"/>
   </p:notesMasterIdLst>
   <p:sldSz cx="9144000" cy="5143500"/>
   <p:notesSz cx="5143500" cy="9144000"/>
@@ -890,6 +892,182 @@
             <a:fld id="{F7021451-1387-4CA6-816F-3879F97B5CBC}" type="slidenum">
               <a:rPr lang="en-US"/>
               <a:t>13</a:t>
+            </a:fld>
+            <a:endParaRPr lang="en-US"/>
+          </a:p>
+        </p:txBody>
+      </p:sp>
+    </p:spTree>
+    <p:extLst>
+      <p:ext uri="{BB962C8B-B14F-4D97-AF65-F5344CB8AC3E}">
+        <p14:creationId xmlns:p14="http://schemas.microsoft.com/office/powerpoint/2010/main" val="1024086991"/>
+      </p:ext>
+    </p:extLst>
+  </p:cSld>
+  <p:clrMapOvr>
+    <a:masterClrMapping/>
+  </p:clrMapOvr>
+</p:notes>
+</file>
+
+<file path=ppt/notesSlides/notesSlide14.xml><?xml version="1.0" encoding="utf-8"?>
+<p:notes xmlns:a="http://schemas.openxmlformats.org/drawingml/2006/main" xmlns:r="http://schemas.openxmlformats.org/officeDocument/2006/relationships" xmlns:p="http://schemas.openxmlformats.org/presentationml/2006/main">
+  <p:cSld>
+    <p:spTree>
+      <p:nvGrpSpPr>
+        <p:cNvPr id="1" name=""/>
+        <p:cNvGrpSpPr/>
+        <p:nvPr/>
+      </p:nvGrpSpPr>
+      <p:grpSpPr>
+        <a:xfrm>
+          <a:off x="0" y="0"/>
+          <a:ext cx="0" cy="0"/>
+          <a:chOff x="0" y="0"/>
+          <a:chExt cx="0" cy="0"/>
+        </a:xfrm>
+      </p:grpSpPr>
+      <p:sp>
+        <p:nvSpPr>
+          <p:cNvPr id="2" name="Slide Image Placeholder 1"/>
+          <p:cNvSpPr>
+            <a:spLocks noGrp="1" noRot="1" noChangeAspect="1"/>
+          </p:cNvSpPr>
+          <p:nvPr>
+            <p:ph type="sldImg"/>
+          </p:nvPr>
+        </p:nvSpPr>
+        <p:spPr/>
+      </p:sp>
+      <p:sp>
+        <p:nvSpPr>
+          <p:cNvPr id="3" name="Notes Placeholder 2"/>
+          <p:cNvSpPr>
+            <a:spLocks noGrp="1"/>
+          </p:cNvSpPr>
+          <p:nvPr>
+            <p:ph type="body" idx="1"/>
+          </p:nvPr>
+        </p:nvSpPr>
+        <p:spPr/>
+        <p:txBody>
+          <a:bodyPr/>
+          <a:lstStyle/>
+          <a:p>
+            <a:r>
+              <a:rPr lang="en-US" dirty="0"/>
+              <a:t/>
+            </a:r>
+            <a:endParaRPr lang="en-US" dirty="0"/>
+          </a:p>
+        </p:txBody>
+      </p:sp>
+      <p:sp>
+        <p:nvSpPr>
+          <p:cNvPr id="4" name="Slide Number Placeholder 3"/>
+          <p:cNvSpPr>
+            <a:spLocks noGrp="1"/>
+          </p:cNvSpPr>
+          <p:nvPr>
+            <p:ph type="sldNum" sz="quarter" idx="10"/>
+          </p:nvPr>
+        </p:nvSpPr>
+        <p:spPr/>
+        <p:txBody>
+          <a:bodyPr/>
+          <a:lstStyle/>
+          <a:p>
+            <a:fld id="{F7021451-1387-4CA6-816F-3879F97B5CBC}" type="slidenum">
+              <a:rPr lang="en-US"/>
+              <a:t>14</a:t>
+            </a:fld>
+            <a:endParaRPr lang="en-US"/>
+          </a:p>
+        </p:txBody>
+      </p:sp>
+    </p:spTree>
+    <p:extLst>
+      <p:ext uri="{BB962C8B-B14F-4D97-AF65-F5344CB8AC3E}">
+        <p14:creationId xmlns:p14="http://schemas.microsoft.com/office/powerpoint/2010/main" val="1024086991"/>
+      </p:ext>
+    </p:extLst>
+  </p:cSld>
+  <p:clrMapOvr>
+    <a:masterClrMapping/>
+  </p:clrMapOvr>
+</p:notes>
+</file>
+
+<file path=ppt/notesSlides/notesSlide15.xml><?xml version="1.0" encoding="utf-8"?>
+<p:notes xmlns:a="http://schemas.openxmlformats.org/drawingml/2006/main" xmlns:r="http://schemas.openxmlformats.org/officeDocument/2006/relationships" xmlns:p="http://schemas.openxmlformats.org/presentationml/2006/main">
+  <p:cSld>
+    <p:spTree>
+      <p:nvGrpSpPr>
+        <p:cNvPr id="1" name=""/>
+        <p:cNvGrpSpPr/>
+        <p:nvPr/>
+      </p:nvGrpSpPr>
+      <p:grpSpPr>
+        <a:xfrm>
+          <a:off x="0" y="0"/>
+          <a:ext cx="0" cy="0"/>
+          <a:chOff x="0" y="0"/>
+          <a:chExt cx="0" cy="0"/>
+        </a:xfrm>
+      </p:grpSpPr>
+      <p:sp>
+        <p:nvSpPr>
+          <p:cNvPr id="2" name="Slide Image Placeholder 1"/>
+          <p:cNvSpPr>
+            <a:spLocks noGrp="1" noRot="1" noChangeAspect="1"/>
+          </p:cNvSpPr>
+          <p:nvPr>
+            <p:ph type="sldImg"/>
+          </p:nvPr>
+        </p:nvSpPr>
+        <p:spPr/>
+      </p:sp>
+      <p:sp>
+        <p:nvSpPr>
+          <p:cNvPr id="3" name="Notes Placeholder 2"/>
+          <p:cNvSpPr>
+            <a:spLocks noGrp="1"/>
+          </p:cNvSpPr>
+          <p:nvPr>
+            <p:ph type="body" idx="1"/>
+          </p:nvPr>
+        </p:nvSpPr>
+        <p:spPr/>
+        <p:txBody>
+          <a:bodyPr/>
+          <a:lstStyle/>
+          <a:p>
+            <a:r>
+              <a:rPr lang="en-US" dirty="0"/>
+              <a:t/>
+            </a:r>
+            <a:endParaRPr lang="en-US" dirty="0"/>
+          </a:p>
+        </p:txBody>
+      </p:sp>
+      <p:sp>
+        <p:nvSpPr>
+          <p:cNvPr id="4" name="Slide Number Placeholder 3"/>
+          <p:cNvSpPr>
+            <a:spLocks noGrp="1"/>
+          </p:cNvSpPr>
+          <p:nvPr>
+            <p:ph type="sldNum" sz="quarter" idx="10"/>
+          </p:nvPr>
+        </p:nvSpPr>
+        <p:spPr/>
+        <p:txBody>
+          <a:bodyPr/>
+          <a:lstStyle/>
+          <a:p>
+            <a:fld id="{F7021451-1387-4CA6-816F-3879F97B5CBC}" type="slidenum">
+              <a:rPr lang="en-US"/>
+              <a:t>15</a:t>
             </a:fld>
             <a:endParaRPr lang="en-US"/>
           </a:p>
@@ -2143,148 +2321,6 @@
         </p:nvSpPr>
         <p:spPr>
           <a:xfrm>
-            <a:off x="406301" y="1223963"/>
-            <a:ext cx="8498026" cy="274290"/>
-          </a:xfrm>
-          <a:prstGeom prst="rect">
-            <a:avLst/>
-          </a:prstGeom>
-          <a:noFill/>
-          <a:ln/>
-        </p:spPr>
-        <p:txBody>
-          <a:bodyPr wrap="square" lIns="0" tIns="0" rIns="0" bIns="0" rtlCol="0" anchor="t"/>
-          <a:lstStyle/>
-          <a:p>
-            <a:pPr algn="l" indent="0" marL="0">
-              <a:lnSpc>
-                <a:spcPts val="2160"/>
-              </a:lnSpc>
-              <a:spcBef>
-                <a:spcPts val="600"/>
-              </a:spcBef>
-              <a:spcAft>
-                <a:spcPts val="800"/>
-              </a:spcAft>
-              <a:buNone/>
-            </a:pPr>
-            <a:r>
-              <a:rPr lang="en-US" sz="1800" b="1" dirty="0">
-                <a:solidFill>
-                  <a:srgbClr val="E07A5F"/>
-                </a:solidFill>
-                <a:latin typeface="Georgia" pitchFamily="34" charset="0"/>
-                <a:ea typeface="Georgia" pitchFamily="34" charset="-122"/>
-                <a:cs typeface="Georgia" pitchFamily="34" charset="-120"/>
-              </a:rPr>
-              <a:t>Goal</a:t>
-            </a:r>
-            <a:endParaRPr lang="en-US" sz="1800" dirty="0"/>
-          </a:p>
-        </p:txBody>
-      </p:sp>
-      <p:sp>
-        <p:nvSpPr>
-          <p:cNvPr id="6" name="Text 4"/>
-          <p:cNvSpPr/>
-          <p:nvPr/>
-        </p:nvSpPr>
-        <p:spPr>
-          <a:xfrm>
-            <a:off x="406301" y="1637854"/>
-            <a:ext cx="8498026" cy="213271"/>
-          </a:xfrm>
-          <a:prstGeom prst="rect">
-            <a:avLst/>
-          </a:prstGeom>
-          <a:noFill/>
-          <a:ln/>
-        </p:spPr>
-        <p:txBody>
-          <a:bodyPr wrap="square" lIns="0" tIns="0" rIns="0" bIns="0" rtlCol="0" anchor="t"/>
-          <a:lstStyle/>
-          <a:p>
-            <a:pPr algn="l" indent="0" marL="0">
-              <a:lnSpc>
-                <a:spcPts val="1680"/>
-              </a:lnSpc>
-              <a:spcBef>
-                <a:spcPts val="300"/>
-              </a:spcBef>
-              <a:spcAft>
-                <a:spcPts val="300"/>
-              </a:spcAft>
-              <a:buNone/>
-            </a:pPr>
-            <a:r>
-              <a:rPr lang="en-US" sz="1200" dirty="0">
-                <a:solidFill>
-                  <a:srgbClr val="2C2C2C"/>
-                </a:solidFill>
-                <a:latin typeface="Verdana" pitchFamily="34" charset="0"/>
-                <a:ea typeface="Verdana" pitchFamily="34" charset="-122"/>
-                <a:cs typeface="Verdana" pitchFamily="34" charset="-120"/>
-              </a:rPr>
-              <a:t>Children notice </a:t>
-            </a:r>
-            <a:pPr algn="l" indent="0" marL="0">
-              <a:lnSpc>
-                <a:spcPts val="1680"/>
-              </a:lnSpc>
-              <a:spcBef>
-                <a:spcPts val="300"/>
-              </a:spcBef>
-              <a:spcAft>
-                <a:spcPts val="300"/>
-              </a:spcAft>
-              <a:buNone/>
-            </a:pPr>
-            <a:r>
-              <a:rPr lang="en-US" sz="1200" i="1" dirty="0">
-                <a:solidFill>
-                  <a:srgbClr val="2C2C2C"/>
-                </a:solidFill>
-                <a:latin typeface="Verdana" pitchFamily="34" charset="0"/>
-                <a:ea typeface="Verdana" pitchFamily="34" charset="-122"/>
-                <a:cs typeface="Verdana" pitchFamily="34" charset="-120"/>
-              </a:rPr>
-              <a:t>ākāśa</a:t>
-            </a:r>
-            <a:pPr algn="l" indent="0" marL="0">
-              <a:lnSpc>
-                <a:spcPts val="1680"/>
-              </a:lnSpc>
-              <a:spcBef>
-                <a:spcPts val="300"/>
-              </a:spcBef>
-              <a:spcAft>
-                <a:spcPts val="300"/>
-              </a:spcAft>
-              <a:buNone/>
-            </a:pPr>
-            <a:r>
-              <a:rPr lang="en-US" sz="1200" dirty="0">
-                <a:solidFill>
-                  <a:srgbClr val="2C2C2C"/>
-                </a:solidFill>
-                <a:latin typeface="Verdana" pitchFamily="34" charset="0"/>
-                <a:ea typeface="Verdana" pitchFamily="34" charset="-122"/>
-                <a:cs typeface="Verdana" pitchFamily="34" charset="-120"/>
-              </a:rPr>
-              <a:t> — the element that has no shape, colour, or smell — by exploring empty space.</a:t>
-            </a:r>
-            <a:endParaRPr lang="en-US" sz="1200" dirty="0"/>
-          </a:p>
-        </p:txBody>
-      </p:sp>
-      <p:sp>
-        <p:nvSpPr>
-          <p:cNvPr id="7" name="Text 5"/>
-          <p:cNvSpPr/>
-          <p:nvPr/>
-        </p:nvSpPr>
-        <p:spPr>
-          <a:xfrm>
             <a:off x="406301" y="4434929"/>
             <a:ext cx="8498026" cy="213271"/>
           </a:xfrm>
@@ -2429,7 +2465,7 @@
                 <a:ea typeface="Georgia" pitchFamily="34" charset="-122"/>
                 <a:cs typeface="Georgia" pitchFamily="34" charset="-120"/>
               </a:rPr>
-              <a:t>Show + chant (2 min)</a:t>
+              <a:t>Sound demonstration (5 min)</a:t>
             </a:r>
             <a:endParaRPr lang="en-US" sz="1800" dirty="0"/>
           </a:p>
@@ -2443,8 +2479,8 @@
         </p:nvSpPr>
         <p:spPr>
           <a:xfrm>
-            <a:off x="406301" y="870942"/>
-            <a:ext cx="8498026" cy="213271"/>
+            <a:off x="634901" y="883593"/>
+            <a:ext cx="8102798" cy="769441"/>
           </a:xfrm>
           <a:prstGeom prst="rect">
             <a:avLst/>
@@ -2456,20 +2492,18 @@
           <a:bodyPr wrap="square" lIns="0" tIns="0" rIns="0" bIns="0" rtlCol="0" anchor="t"/>
           <a:lstStyle/>
           <a:p>
-            <a:pPr algn="l" indent="0" marL="0">
-              <a:lnSpc>
-                <a:spcPts val="1680"/>
-              </a:lnSpc>
-              <a:spcBef>
-                <a:spcPts val="300"/>
-              </a:spcBef>
-              <a:spcAft>
-                <a:spcPts val="300"/>
-              </a:spcAft>
-              <a:buNone/>
-            </a:pPr>
-            <a:r>
-              <a:rPr lang="en-US" sz="1200" dirty="0">
+            <a:pPr algn="l" marL="342900" indent="-342900">
+              <a:lnSpc>
+                <a:spcPts val="1620"/>
+              </a:lnSpc>
+              <a:spcAft>
+                <a:spcPts val="300"/>
+              </a:spcAft>
+              <a:buSzPct val="100000"/>
+              <a:buChar char="•"/>
+            </a:pPr>
+            <a:r>
+              <a:rPr lang="en-US" sz="1200" i="1" dirty="0">
                 <a:solidFill>
                   <a:srgbClr val="2C2C2C"/>
                 </a:solidFill>
@@ -2477,7 +2511,155 @@
                 <a:ea typeface="Verdana" pitchFamily="34" charset="-122"/>
                 <a:cs typeface="Verdana" pitchFamily="34" charset="-120"/>
               </a:rPr>
-              <a:t>2 shares. Chant to close.</a:t>
+              <a:t>"Ākāśa has one special thing — sound travels through it."</a:t>
+            </a:r>
+            <a:endParaRPr lang="en-US" sz="1200" dirty="0"/>
+          </a:p>
+          <a:p>
+            <a:pPr algn="l" marL="342900" indent="-342900">
+              <a:lnSpc>
+                <a:spcPts val="1620"/>
+              </a:lnSpc>
+              <a:spcAft>
+                <a:spcPts val="300"/>
+              </a:spcAft>
+              <a:buSzPct val="100000"/>
+              <a:buChar char="•"/>
+            </a:pPr>
+            <a:r>
+              <a:rPr lang="en-US" sz="1200" dirty="0">
+                <a:solidFill>
+                  <a:srgbClr val="2C2C2C"/>
+                </a:solidFill>
+                <a:latin typeface="Verdana" pitchFamily="34" charset="0"/>
+                <a:ea typeface="Verdana" pitchFamily="34" charset="-122"/>
+                <a:cs typeface="Verdana" pitchFamily="34" charset="-120"/>
+              </a:rPr>
+              <a:t>Clap once, loudly. </a:t>
+            </a:r>
+            <a:pPr algn="l" indent="0" marL="0">
+              <a:lnSpc>
+                <a:spcPts val="1620"/>
+              </a:lnSpc>
+              <a:spcAft>
+                <a:spcPts val="300"/>
+              </a:spcAft>
+              <a:buNone/>
+            </a:pPr>
+            <a:r>
+              <a:rPr lang="en-US" sz="1200" i="1" dirty="0">
+                <a:solidFill>
+                  <a:srgbClr val="2C2C2C"/>
+                </a:solidFill>
+                <a:latin typeface="Verdana" pitchFamily="34" charset="0"/>
+                <a:ea typeface="Verdana" pitchFamily="34" charset="-122"/>
+                <a:cs typeface="Verdana" pitchFamily="34" charset="-120"/>
+              </a:rPr>
+              <a:t>"That clap travelled through Ākāśa to your ears."</a:t>
+            </a:r>
+            <a:endParaRPr lang="en-US" sz="1200" dirty="0"/>
+          </a:p>
+          <a:p>
+            <a:pPr algn="l" marL="342900" indent="-342900">
+              <a:lnSpc>
+                <a:spcPts val="1620"/>
+              </a:lnSpc>
+              <a:spcAft>
+                <a:spcPts val="300"/>
+              </a:spcAft>
+              <a:buSzPct val="100000"/>
+              <a:buChar char="•"/>
+            </a:pPr>
+            <a:r>
+              <a:rPr lang="en-US" sz="1200" i="1" dirty="0">
+                <a:solidFill>
+                  <a:srgbClr val="2C2C2C"/>
+                </a:solidFill>
+                <a:latin typeface="Verdana" pitchFamily="34" charset="0"/>
+                <a:ea typeface="Verdana" pitchFamily="34" charset="-122"/>
+                <a:cs typeface="Verdana" pitchFamily="34" charset="-120"/>
+              </a:rPr>
+              <a:t>"That's why old Indian thinkers said Ākāśa's quality is </a:t>
+            </a:r>
+            <a:pPr algn="l" indent="0" marL="0">
+              <a:lnSpc>
+                <a:spcPts val="1620"/>
+              </a:lnSpc>
+              <a:spcAft>
+                <a:spcPts val="300"/>
+              </a:spcAft>
+              <a:buNone/>
+            </a:pPr>
+            <a:r>
+              <a:rPr lang="en-US" sz="1200" b="1" i="1" dirty="0">
+                <a:solidFill>
+                  <a:srgbClr val="2C2C2C"/>
+                </a:solidFill>
+                <a:latin typeface="Verdana" pitchFamily="34" charset="0"/>
+                <a:ea typeface="Verdana" pitchFamily="34" charset="-122"/>
+                <a:cs typeface="Verdana" pitchFamily="34" charset="-120"/>
+              </a:rPr>
+              <a:t>sound</a:t>
+            </a:r>
+            <a:pPr algn="l" indent="0" marL="0">
+              <a:lnSpc>
+                <a:spcPts val="1620"/>
+              </a:lnSpc>
+              <a:spcAft>
+                <a:spcPts val="300"/>
+              </a:spcAft>
+              <a:buNone/>
+            </a:pPr>
+            <a:r>
+              <a:rPr lang="en-US" sz="1200" i="1" dirty="0">
+                <a:solidFill>
+                  <a:srgbClr val="2C2C2C"/>
+                </a:solidFill>
+                <a:latin typeface="Verdana" pitchFamily="34" charset="0"/>
+                <a:ea typeface="Verdana" pitchFamily="34" charset="-122"/>
+                <a:cs typeface="Verdana" pitchFamily="34" charset="-120"/>
+              </a:rPr>
+              <a:t> (</a:t>
+            </a:r>
+            <a:pPr algn="l" indent="0" marL="0">
+              <a:lnSpc>
+                <a:spcPts val="1620"/>
+              </a:lnSpc>
+              <a:spcAft>
+                <a:spcPts val="300"/>
+              </a:spcAft>
+              <a:buNone/>
+            </a:pPr>
+            <a:r>
+              <a:rPr lang="en-US" sz="1200" dirty="0">
+                <a:solidFill>
+                  <a:srgbClr val="2C2C2C"/>
+                </a:solidFill>
+                <a:latin typeface="Verdana" pitchFamily="34" charset="0"/>
+                <a:ea typeface="Verdana" pitchFamily="34" charset="-122"/>
+                <a:cs typeface="Verdana" pitchFamily="34" charset="-120"/>
+              </a:rPr>
+              <a:t>śabda</a:t>
+            </a:r>
+            <a:pPr algn="l" indent="0" marL="0">
+              <a:lnSpc>
+                <a:spcPts val="1620"/>
+              </a:lnSpc>
+              <a:spcAft>
+                <a:spcPts val="300"/>
+              </a:spcAft>
+              <a:buNone/>
+            </a:pPr>
+            <a:r>
+              <a:rPr lang="en-US" sz="1200" i="1" dirty="0">
+                <a:solidFill>
+                  <a:srgbClr val="2C2C2C"/>
+                </a:solidFill>
+                <a:latin typeface="Verdana" pitchFamily="34" charset="0"/>
+                <a:ea typeface="Verdana" pitchFamily="34" charset="-122"/>
+                <a:cs typeface="Verdana" pitchFamily="34" charset="-120"/>
+              </a:rPr>
+              <a:t>)."</a:t>
             </a:r>
             <a:endParaRPr lang="en-US" sz="1200" dirty="0"/>
           </a:p>
@@ -2635,7 +2817,7 @@
                 <a:ea typeface="Georgia" pitchFamily="34" charset="-122"/>
                 <a:cs typeface="Georgia" pitchFamily="34" charset="-120"/>
               </a:rPr>
-              <a:t>Homework</a:t>
+              <a:t>Draw (5 min)</a:t>
             </a:r>
             <a:endParaRPr lang="en-US" sz="1800" dirty="0"/>
           </a:p>
@@ -2650,7 +2832,7 @@
         <p:spPr>
           <a:xfrm>
             <a:off x="406301" y="870942"/>
-            <a:ext cx="8498026" cy="213271"/>
+            <a:ext cx="8498026" cy="426541"/>
           </a:xfrm>
           <a:prstGeom prst="rect">
             <a:avLst/>
@@ -2683,7 +2865,7 @@
                 <a:ea typeface="Verdana" pitchFamily="34" charset="-122"/>
                 <a:cs typeface="Verdana" pitchFamily="34" charset="-120"/>
               </a:rPr>
-              <a:t>– Tomorrow we sing! Practise the chant at home with a parent or sibling.</a:t>
+              <a:t>Each child draws a place at home where they notice Ākāśa most. (The space under their bed? The empty room when no one's there? The sky?)</a:t>
             </a:r>
             <a:endParaRPr lang="en-US" sz="1200" dirty="0"/>
           </a:p>
@@ -2841,7 +3023,7 @@
                 <a:ea typeface="Georgia" pitchFamily="34" charset="-122"/>
                 <a:cs typeface="Georgia" pitchFamily="34" charset="-120"/>
               </a:rPr>
-              <a:t>Differentiation</a:t>
+              <a:t>Show + chant (2 min)</a:t>
             </a:r>
             <a:endParaRPr lang="en-US" sz="1800" dirty="0"/>
           </a:p>
@@ -2855,8 +3037,8 @@
         </p:nvSpPr>
         <p:spPr>
           <a:xfrm>
-            <a:off x="634901" y="883593"/>
-            <a:ext cx="8102798" cy="731341"/>
+            <a:off x="406301" y="870942"/>
+            <a:ext cx="8498026" cy="213271"/>
           </a:xfrm>
           <a:prstGeom prst="rect">
             <a:avLst/>
@@ -2868,18 +3050,20 @@
           <a:bodyPr wrap="square" lIns="0" tIns="0" rIns="0" bIns="0" rtlCol="0" anchor="t"/>
           <a:lstStyle/>
           <a:p>
-            <a:pPr algn="l" marL="342900" indent="-342900">
-              <a:lnSpc>
-                <a:spcPts val="1620"/>
-              </a:lnSpc>
-              <a:spcAft>
-                <a:spcPts val="300"/>
-              </a:spcAft>
-              <a:buSzPct val="100000"/>
-              <a:buChar char="•"/>
-            </a:pPr>
-            <a:r>
-              <a:rPr lang="en-US" sz="1200" b="1" dirty="0">
+            <a:pPr algn="l" indent="0" marL="0">
+              <a:lnSpc>
+                <a:spcPts val="1680"/>
+              </a:lnSpc>
+              <a:spcBef>
+                <a:spcPts val="300"/>
+              </a:spcBef>
+              <a:spcAft>
+                <a:spcPts val="300"/>
+              </a:spcAft>
+              <a:buNone/>
+            </a:pPr>
+            <a:r>
+              <a:rPr lang="en-US" sz="1200" dirty="0">
                 <a:solidFill>
                   <a:srgbClr val="2C2C2C"/>
                 </a:solidFill>
@@ -2887,71 +3071,7 @@
                 <a:ea typeface="Verdana" pitchFamily="34" charset="-122"/>
                 <a:cs typeface="Verdana" pitchFamily="34" charset="-120"/>
               </a:rPr>
-              <a:t>Tier up:</a:t>
-            </a:r>
-            <a:pPr algn="l" indent="0" marL="0">
-              <a:lnSpc>
-                <a:spcPts val="1620"/>
-              </a:lnSpc>
-              <a:spcAft>
-                <a:spcPts val="300"/>
-              </a:spcAft>
-              <a:buNone/>
-            </a:pPr>
-            <a:r>
-              <a:rPr lang="en-US" sz="1200" dirty="0">
-                <a:solidFill>
-                  <a:srgbClr val="2C2C2C"/>
-                </a:solidFill>
-                <a:latin typeface="Verdana" pitchFamily="34" charset="0"/>
-                <a:ea typeface="Verdana" pitchFamily="34" charset="-122"/>
-                <a:cs typeface="Verdana" pitchFamily="34" charset="-120"/>
-              </a:rPr>
-              <a:t> Can you think of a place where there's NO Ākāśa? (Trick question — even inside the densest rock, there's a tiny bit of space between atoms. But that's a Grade 6+ idea.)</a:t>
-            </a:r>
-            <a:endParaRPr lang="en-US" sz="1200" dirty="0"/>
-          </a:p>
-          <a:p>
-            <a:pPr algn="l" marL="342900" indent="-342900">
-              <a:lnSpc>
-                <a:spcPts val="1620"/>
-              </a:lnSpc>
-              <a:spcAft>
-                <a:spcPts val="300"/>
-              </a:spcAft>
-              <a:buSzPct val="100000"/>
-              <a:buChar char="•"/>
-            </a:pPr>
-            <a:r>
-              <a:rPr lang="en-US" sz="1200" b="1" dirty="0">
-                <a:solidFill>
-                  <a:srgbClr val="2C2C2C"/>
-                </a:solidFill>
-                <a:latin typeface="Verdana" pitchFamily="34" charset="0"/>
-                <a:ea typeface="Verdana" pitchFamily="34" charset="-122"/>
-                <a:cs typeface="Verdana" pitchFamily="34" charset="-120"/>
-              </a:rPr>
-              <a:t>Tier down:</a:t>
-            </a:r>
-            <a:pPr algn="l" indent="0" marL="0">
-              <a:lnSpc>
-                <a:spcPts val="1620"/>
-              </a:lnSpc>
-              <a:spcAft>
-                <a:spcPts val="300"/>
-              </a:spcAft>
-              <a:buNone/>
-            </a:pPr>
-            <a:r>
-              <a:rPr lang="en-US" sz="1200" dirty="0">
-                <a:solidFill>
-                  <a:srgbClr val="2C2C2C"/>
-                </a:solidFill>
-                <a:latin typeface="Verdana" pitchFamily="34" charset="0"/>
-                <a:ea typeface="Verdana" pitchFamily="34" charset="-122"/>
-                <a:cs typeface="Verdana" pitchFamily="34" charset="-120"/>
-              </a:rPr>
-              <a:t> Just remember: Ākāśa = the empty room where everything else lives.</a:t>
+              <a:t>2 shares. Chant to close.</a:t>
             </a:r>
             <a:endParaRPr lang="en-US" sz="1200" dirty="0"/>
           </a:p>
@@ -3109,7 +3229,7 @@
                 <a:ea typeface="Georgia" pitchFamily="34" charset="-122"/>
                 <a:cs typeface="Georgia" pitchFamily="34" charset="-120"/>
               </a:rPr>
-              <a:t>Teacher's quick notes</a:t>
+              <a:t>Homework</a:t>
             </a:r>
             <a:endParaRPr lang="en-US" sz="1800" dirty="0"/>
           </a:p>
@@ -3123,8 +3243,8 @@
         </p:nvSpPr>
         <p:spPr>
           <a:xfrm>
-            <a:off x="406301" y="870942"/>
-            <a:ext cx="8498026" cy="639812"/>
+            <a:off x="634901" y="883593"/>
+            <a:ext cx="8102798" cy="281880"/>
           </a:xfrm>
           <a:prstGeom prst="rect">
             <a:avLst/>
@@ -3136,17 +3256,15 @@
           <a:bodyPr wrap="square" lIns="0" tIns="0" rIns="0" bIns="0" rtlCol="0" anchor="t"/>
           <a:lstStyle/>
           <a:p>
-            <a:pPr algn="l" indent="0" marL="0">
-              <a:lnSpc>
-                <a:spcPts val="1680"/>
-              </a:lnSpc>
-              <a:spcBef>
-                <a:spcPts val="300"/>
-              </a:spcBef>
-              <a:spcAft>
-                <a:spcPts val="300"/>
-              </a:spcAft>
-              <a:buNone/>
+            <a:pPr algn="l" marL="342900" indent="-342900">
+              <a:lnSpc>
+                <a:spcPts val="1620"/>
+              </a:lnSpc>
+              <a:spcAft>
+                <a:spcPts val="300"/>
+              </a:spcAft>
+              <a:buSzPct val="100000"/>
+              <a:buChar char="•"/>
             </a:pPr>
             <a:r>
               <a:rPr lang="en-US" sz="1200" dirty="0">
@@ -3157,8 +3275,33 @@
                 <a:ea typeface="Verdana" pitchFamily="34" charset="-122"/>
                 <a:cs typeface="Verdana" pitchFamily="34" charset="-120"/>
               </a:rPr>
-              <a:t>– This is the hardest day at this band — empty space is an abstract idea. The cardboard-box and arm-gap demos are essential. – Some children will be confused: "but air is in the box too!" — that's fine. </a:t>
-            </a:r>
+              <a:t>Tomorrow we sing! Practise the chant at home with a parent or sibling.</a:t>
+            </a:r>
+            <a:endParaRPr lang="en-US" sz="1200" dirty="0"/>
+          </a:p>
+        </p:txBody>
+      </p:sp>
+      <p:sp>
+        <p:nvSpPr>
+          <p:cNvPr id="5" name="Text 3"/>
+          <p:cNvSpPr/>
+          <p:nvPr/>
+        </p:nvSpPr>
+        <p:spPr>
+          <a:xfrm>
+            <a:off x="406301" y="4434929"/>
+            <a:ext cx="8498026" cy="213271"/>
+          </a:xfrm>
+          <a:prstGeom prst="rect">
+            <a:avLst/>
+          </a:prstGeom>
+          <a:noFill/>
+          <a:ln/>
+        </p:spPr>
+        <p:txBody>
+          <a:bodyPr wrap="square" lIns="0" tIns="0" rIns="0" bIns="0" rtlCol="0" anchor="t"/>
+          <a:lstStyle/>
+          <a:p>
             <a:pPr algn="l" indent="0" marL="0">
               <a:lnSpc>
                 <a:spcPts val="1680"/>
@@ -3166,6 +3309,474 @@
               <a:spcBef>
                 <a:spcPts val="300"/>
               </a:spcBef>
+              <a:spcAft>
+                <a:spcPts val="300"/>
+              </a:spcAft>
+              <a:buNone/>
+            </a:pPr>
+            <a:r>
+              <a:rPr lang="en-US" sz="1200" dirty="0">
+                <a:solidFill>
+                  <a:srgbClr val="2C2C2C"/>
+                </a:solidFill>
+                <a:latin typeface="Verdana" pitchFamily="34" charset="0"/>
+                <a:ea typeface="Verdana" pitchFamily="34" charset="-122"/>
+                <a:cs typeface="Verdana" pitchFamily="34" charset="-120"/>
+              </a:rPr>
+              <a:t>Primary ·  · IKS Curriculum</a:t>
+            </a:r>
+            <a:endParaRPr lang="en-US" sz="1200" dirty="0"/>
+          </a:p>
+        </p:txBody>
+      </p:sp>
+    </p:spTree>
+  </p:cSld>
+  <p:clrMapOvr>
+    <a:masterClrMapping/>
+  </p:clrMapOvr>
+</p:sld>
+</file>
+
+<file path=ppt/slides/slide14.xml><?xml version="1.0" encoding="utf-8"?>
+<p:sld xmlns:a="http://schemas.openxmlformats.org/drawingml/2006/main" xmlns:r="http://schemas.openxmlformats.org/officeDocument/2006/relationships" xmlns:p="http://schemas.openxmlformats.org/presentationml/2006/main">
+  <p:cSld name="Slide 14">
+    <p:bg>
+      <p:bgPr>
+        <a:solidFill>
+          <a:srgbClr val="FAF7F2"/>
+        </a:solidFill>
+      </p:bgPr>
+    </p:bg>
+    <p:spTree>
+      <p:nvGrpSpPr>
+        <p:cNvPr id="1" name=""/>
+        <p:cNvGrpSpPr/>
+        <p:nvPr/>
+      </p:nvGrpSpPr>
+      <p:grpSpPr>
+        <a:xfrm>
+          <a:off x="0" y="0"/>
+          <a:ext cx="0" cy="0"/>
+          <a:chOff x="0" y="0"/>
+          <a:chExt cx="0" cy="0"/>
+        </a:xfrm>
+      </p:grpSpPr>
+      <p:sp>
+        <p:nvSpPr>
+          <p:cNvPr id="2" name="Text 0"/>
+          <p:cNvSpPr/>
+          <p:nvPr/>
+        </p:nvSpPr>
+        <p:spPr>
+          <a:xfrm>
+            <a:off x="0" y="0"/>
+            <a:ext cx="9144000" cy="101501"/>
+          </a:xfrm>
+          <a:prstGeom prst="rect">
+            <a:avLst/>
+          </a:prstGeom>
+          <a:solidFill>
+            <a:srgbClr val="87A96B"/>
+          </a:solidFill>
+          <a:ln/>
+        </p:spPr>
+        <p:txBody>
+          <a:bodyPr wrap="square" rtlCol="0" anchor="ctr"/>
+          <a:lstStyle/>
+          <a:p>
+            <a:pPr indent="0" marL="0">
+              <a:buNone/>
+            </a:pPr>
+            <a:endParaRPr lang="en-US" dirty="0"/>
+          </a:p>
+        </p:txBody>
+      </p:sp>
+      <p:sp>
+        <p:nvSpPr>
+          <p:cNvPr id="3" name="Text 1"/>
+          <p:cNvSpPr/>
+          <p:nvPr/>
+        </p:nvSpPr>
+        <p:spPr>
+          <a:xfrm>
+            <a:off x="406301" y="457051"/>
+            <a:ext cx="8498026" cy="274290"/>
+          </a:xfrm>
+          <a:prstGeom prst="rect">
+            <a:avLst/>
+          </a:prstGeom>
+          <a:noFill/>
+          <a:ln/>
+        </p:spPr>
+        <p:txBody>
+          <a:bodyPr wrap="square" lIns="0" tIns="0" rIns="0" bIns="0" rtlCol="0" anchor="t"/>
+          <a:lstStyle/>
+          <a:p>
+            <a:pPr algn="l" indent="0" marL="0">
+              <a:lnSpc>
+                <a:spcPts val="2160"/>
+              </a:lnSpc>
+              <a:spcBef>
+                <a:spcPts val="600"/>
+              </a:spcBef>
+              <a:spcAft>
+                <a:spcPts val="800"/>
+              </a:spcAft>
+              <a:buNone/>
+            </a:pPr>
+            <a:r>
+              <a:rPr lang="en-US" sz="1800" b="1" dirty="0">
+                <a:solidFill>
+                  <a:srgbClr val="E07A5F"/>
+                </a:solidFill>
+                <a:latin typeface="Georgia" pitchFamily="34" charset="0"/>
+                <a:ea typeface="Georgia" pitchFamily="34" charset="-122"/>
+                <a:cs typeface="Georgia" pitchFamily="34" charset="-120"/>
+              </a:rPr>
+              <a:t>Differentiation</a:t>
+            </a:r>
+            <a:endParaRPr lang="en-US" sz="1800" dirty="0"/>
+          </a:p>
+        </p:txBody>
+      </p:sp>
+      <p:sp>
+        <p:nvSpPr>
+          <p:cNvPr id="4" name="Text 2"/>
+          <p:cNvSpPr/>
+          <p:nvPr/>
+        </p:nvSpPr>
+        <p:spPr>
+          <a:xfrm>
+            <a:off x="634901" y="883593"/>
+            <a:ext cx="8102798" cy="731341"/>
+          </a:xfrm>
+          <a:prstGeom prst="rect">
+            <a:avLst/>
+          </a:prstGeom>
+          <a:noFill/>
+          <a:ln/>
+        </p:spPr>
+        <p:txBody>
+          <a:bodyPr wrap="square" lIns="0" tIns="0" rIns="0" bIns="0" rtlCol="0" anchor="t"/>
+          <a:lstStyle/>
+          <a:p>
+            <a:pPr algn="l" marL="342900" indent="-342900">
+              <a:lnSpc>
+                <a:spcPts val="1620"/>
+              </a:lnSpc>
+              <a:spcAft>
+                <a:spcPts val="300"/>
+              </a:spcAft>
+              <a:buSzPct val="100000"/>
+              <a:buChar char="•"/>
+            </a:pPr>
+            <a:r>
+              <a:rPr lang="en-US" sz="1200" b="1" dirty="0">
+                <a:solidFill>
+                  <a:srgbClr val="2C2C2C"/>
+                </a:solidFill>
+                <a:latin typeface="Verdana" pitchFamily="34" charset="0"/>
+                <a:ea typeface="Verdana" pitchFamily="34" charset="-122"/>
+                <a:cs typeface="Verdana" pitchFamily="34" charset="-120"/>
+              </a:rPr>
+              <a:t>Tier up:</a:t>
+            </a:r>
+            <a:pPr algn="l" indent="0" marL="0">
+              <a:lnSpc>
+                <a:spcPts val="1620"/>
+              </a:lnSpc>
+              <a:spcAft>
+                <a:spcPts val="300"/>
+              </a:spcAft>
+              <a:buNone/>
+            </a:pPr>
+            <a:r>
+              <a:rPr lang="en-US" sz="1200" dirty="0">
+                <a:solidFill>
+                  <a:srgbClr val="2C2C2C"/>
+                </a:solidFill>
+                <a:latin typeface="Verdana" pitchFamily="34" charset="0"/>
+                <a:ea typeface="Verdana" pitchFamily="34" charset="-122"/>
+                <a:cs typeface="Verdana" pitchFamily="34" charset="-120"/>
+              </a:rPr>
+              <a:t> Can you think of a place where there's NO Ākāśa? (Trick question — even inside the densest rock, there's a tiny bit of space between atoms. But that's a Grade 6+ idea.)</a:t>
+            </a:r>
+            <a:endParaRPr lang="en-US" sz="1200" dirty="0"/>
+          </a:p>
+          <a:p>
+            <a:pPr algn="l" marL="342900" indent="-342900">
+              <a:lnSpc>
+                <a:spcPts val="1620"/>
+              </a:lnSpc>
+              <a:spcAft>
+                <a:spcPts val="300"/>
+              </a:spcAft>
+              <a:buSzPct val="100000"/>
+              <a:buChar char="•"/>
+            </a:pPr>
+            <a:r>
+              <a:rPr lang="en-US" sz="1200" b="1" dirty="0">
+                <a:solidFill>
+                  <a:srgbClr val="2C2C2C"/>
+                </a:solidFill>
+                <a:latin typeface="Verdana" pitchFamily="34" charset="0"/>
+                <a:ea typeface="Verdana" pitchFamily="34" charset="-122"/>
+                <a:cs typeface="Verdana" pitchFamily="34" charset="-120"/>
+              </a:rPr>
+              <a:t>Tier down:</a:t>
+            </a:r>
+            <a:pPr algn="l" indent="0" marL="0">
+              <a:lnSpc>
+                <a:spcPts val="1620"/>
+              </a:lnSpc>
+              <a:spcAft>
+                <a:spcPts val="300"/>
+              </a:spcAft>
+              <a:buNone/>
+            </a:pPr>
+            <a:r>
+              <a:rPr lang="en-US" sz="1200" dirty="0">
+                <a:solidFill>
+                  <a:srgbClr val="2C2C2C"/>
+                </a:solidFill>
+                <a:latin typeface="Verdana" pitchFamily="34" charset="0"/>
+                <a:ea typeface="Verdana" pitchFamily="34" charset="-122"/>
+                <a:cs typeface="Verdana" pitchFamily="34" charset="-120"/>
+              </a:rPr>
+              <a:t> Just remember: Ākāśa = the empty room where everything else lives.</a:t>
+            </a:r>
+            <a:endParaRPr lang="en-US" sz="1200" dirty="0"/>
+          </a:p>
+        </p:txBody>
+      </p:sp>
+      <p:sp>
+        <p:nvSpPr>
+          <p:cNvPr id="5" name="Text 3"/>
+          <p:cNvSpPr/>
+          <p:nvPr/>
+        </p:nvSpPr>
+        <p:spPr>
+          <a:xfrm>
+            <a:off x="406301" y="4434929"/>
+            <a:ext cx="8498026" cy="213271"/>
+          </a:xfrm>
+          <a:prstGeom prst="rect">
+            <a:avLst/>
+          </a:prstGeom>
+          <a:noFill/>
+          <a:ln/>
+        </p:spPr>
+        <p:txBody>
+          <a:bodyPr wrap="square" lIns="0" tIns="0" rIns="0" bIns="0" rtlCol="0" anchor="t"/>
+          <a:lstStyle/>
+          <a:p>
+            <a:pPr algn="l" indent="0" marL="0">
+              <a:lnSpc>
+                <a:spcPts val="1680"/>
+              </a:lnSpc>
+              <a:spcBef>
+                <a:spcPts val="300"/>
+              </a:spcBef>
+              <a:spcAft>
+                <a:spcPts val="300"/>
+              </a:spcAft>
+              <a:buNone/>
+            </a:pPr>
+            <a:r>
+              <a:rPr lang="en-US" sz="1200" dirty="0">
+                <a:solidFill>
+                  <a:srgbClr val="2C2C2C"/>
+                </a:solidFill>
+                <a:latin typeface="Verdana" pitchFamily="34" charset="0"/>
+                <a:ea typeface="Verdana" pitchFamily="34" charset="-122"/>
+                <a:cs typeface="Verdana" pitchFamily="34" charset="-120"/>
+              </a:rPr>
+              <a:t>Primary ·  · IKS Curriculum</a:t>
+            </a:r>
+            <a:endParaRPr lang="en-US" sz="1200" dirty="0"/>
+          </a:p>
+        </p:txBody>
+      </p:sp>
+    </p:spTree>
+  </p:cSld>
+  <p:clrMapOvr>
+    <a:masterClrMapping/>
+  </p:clrMapOvr>
+</p:sld>
+</file>
+
+<file path=ppt/slides/slide15.xml><?xml version="1.0" encoding="utf-8"?>
+<p:sld xmlns:a="http://schemas.openxmlformats.org/drawingml/2006/main" xmlns:r="http://schemas.openxmlformats.org/officeDocument/2006/relationships" xmlns:p="http://schemas.openxmlformats.org/presentationml/2006/main">
+  <p:cSld name="Slide 15">
+    <p:bg>
+      <p:bgPr>
+        <a:solidFill>
+          <a:srgbClr val="FAF7F2"/>
+        </a:solidFill>
+      </p:bgPr>
+    </p:bg>
+    <p:spTree>
+      <p:nvGrpSpPr>
+        <p:cNvPr id="1" name=""/>
+        <p:cNvGrpSpPr/>
+        <p:nvPr/>
+      </p:nvGrpSpPr>
+      <p:grpSpPr>
+        <a:xfrm>
+          <a:off x="0" y="0"/>
+          <a:ext cx="0" cy="0"/>
+          <a:chOff x="0" y="0"/>
+          <a:chExt cx="0" cy="0"/>
+        </a:xfrm>
+      </p:grpSpPr>
+      <p:sp>
+        <p:nvSpPr>
+          <p:cNvPr id="2" name="Text 0"/>
+          <p:cNvSpPr/>
+          <p:nvPr/>
+        </p:nvSpPr>
+        <p:spPr>
+          <a:xfrm>
+            <a:off x="0" y="0"/>
+            <a:ext cx="9144000" cy="101501"/>
+          </a:xfrm>
+          <a:prstGeom prst="rect">
+            <a:avLst/>
+          </a:prstGeom>
+          <a:solidFill>
+            <a:srgbClr val="87A96B"/>
+          </a:solidFill>
+          <a:ln/>
+        </p:spPr>
+        <p:txBody>
+          <a:bodyPr wrap="square" rtlCol="0" anchor="ctr"/>
+          <a:lstStyle/>
+          <a:p>
+            <a:pPr indent="0" marL="0">
+              <a:buNone/>
+            </a:pPr>
+            <a:endParaRPr lang="en-US" dirty="0"/>
+          </a:p>
+        </p:txBody>
+      </p:sp>
+      <p:sp>
+        <p:nvSpPr>
+          <p:cNvPr id="3" name="Text 1"/>
+          <p:cNvSpPr/>
+          <p:nvPr/>
+        </p:nvSpPr>
+        <p:spPr>
+          <a:xfrm>
+            <a:off x="406301" y="457051"/>
+            <a:ext cx="8498026" cy="274290"/>
+          </a:xfrm>
+          <a:prstGeom prst="rect">
+            <a:avLst/>
+          </a:prstGeom>
+          <a:noFill/>
+          <a:ln/>
+        </p:spPr>
+        <p:txBody>
+          <a:bodyPr wrap="square" lIns="0" tIns="0" rIns="0" bIns="0" rtlCol="0" anchor="t"/>
+          <a:lstStyle/>
+          <a:p>
+            <a:pPr algn="l" indent="0" marL="0">
+              <a:lnSpc>
+                <a:spcPts val="2160"/>
+              </a:lnSpc>
+              <a:spcBef>
+                <a:spcPts val="600"/>
+              </a:spcBef>
+              <a:spcAft>
+                <a:spcPts val="800"/>
+              </a:spcAft>
+              <a:buNone/>
+            </a:pPr>
+            <a:r>
+              <a:rPr lang="en-US" sz="1800" b="1" dirty="0">
+                <a:solidFill>
+                  <a:srgbClr val="E07A5F"/>
+                </a:solidFill>
+                <a:latin typeface="Georgia" pitchFamily="34" charset="0"/>
+                <a:ea typeface="Georgia" pitchFamily="34" charset="-122"/>
+                <a:cs typeface="Georgia" pitchFamily="34" charset="-120"/>
+              </a:rPr>
+              <a:t>Teacher's quick notes</a:t>
+            </a:r>
+            <a:endParaRPr lang="en-US" sz="1800" dirty="0"/>
+          </a:p>
+        </p:txBody>
+      </p:sp>
+      <p:sp>
+        <p:nvSpPr>
+          <p:cNvPr id="4" name="Text 2"/>
+          <p:cNvSpPr/>
+          <p:nvPr/>
+        </p:nvSpPr>
+        <p:spPr>
+          <a:xfrm>
+            <a:off x="634901" y="883593"/>
+            <a:ext cx="8102798" cy="937022"/>
+          </a:xfrm>
+          <a:prstGeom prst="rect">
+            <a:avLst/>
+          </a:prstGeom>
+          <a:noFill/>
+          <a:ln/>
+        </p:spPr>
+        <p:txBody>
+          <a:bodyPr wrap="square" lIns="0" tIns="0" rIns="0" bIns="0" rtlCol="0" anchor="t"/>
+          <a:lstStyle/>
+          <a:p>
+            <a:pPr algn="l" marL="342900" indent="-342900">
+              <a:lnSpc>
+                <a:spcPts val="1620"/>
+              </a:lnSpc>
+              <a:spcAft>
+                <a:spcPts val="300"/>
+              </a:spcAft>
+              <a:buSzPct val="100000"/>
+              <a:buChar char="•"/>
+            </a:pPr>
+            <a:r>
+              <a:rPr lang="en-US" sz="1200" dirty="0">
+                <a:solidFill>
+                  <a:srgbClr val="2C2C2C"/>
+                </a:solidFill>
+                <a:latin typeface="Verdana" pitchFamily="34" charset="0"/>
+                <a:ea typeface="Verdana" pitchFamily="34" charset="-122"/>
+                <a:cs typeface="Verdana" pitchFamily="34" charset="-120"/>
+              </a:rPr>
+              <a:t>This is the hardest day at this band — empty space is an abstract idea. The cardboard-box and arm-gap demos are essential.</a:t>
+            </a:r>
+            <a:endParaRPr lang="en-US" sz="1200" dirty="0"/>
+          </a:p>
+          <a:p>
+            <a:pPr algn="l" marL="342900" indent="-342900">
+              <a:lnSpc>
+                <a:spcPts val="1620"/>
+              </a:lnSpc>
+              <a:spcAft>
+                <a:spcPts val="300"/>
+              </a:spcAft>
+              <a:buSzPct val="100000"/>
+              <a:buChar char="•"/>
+            </a:pPr>
+            <a:r>
+              <a:rPr lang="en-US" sz="1200" dirty="0">
+                <a:solidFill>
+                  <a:srgbClr val="2C2C2C"/>
+                </a:solidFill>
+                <a:latin typeface="Verdana" pitchFamily="34" charset="0"/>
+                <a:ea typeface="Verdana" pitchFamily="34" charset="-122"/>
+                <a:cs typeface="Verdana" pitchFamily="34" charset="-120"/>
+              </a:rPr>
+              <a:t>Some children will be confused: "but air is in the box too!" — that's fine. </a:t>
+            </a:r>
+            <a:pPr algn="l" indent="0" marL="0">
+              <a:lnSpc>
+                <a:spcPts val="1620"/>
+              </a:lnSpc>
               <a:spcAft>
                 <a:spcPts val="300"/>
               </a:spcAft>
@@ -3338,7 +3949,7 @@
                 <a:ea typeface="Georgia" pitchFamily="34" charset="-122"/>
                 <a:cs typeface="Georgia" pitchFamily="34" charset="-120"/>
               </a:rPr>
-              <a:t>Materials</a:t>
+              <a:t>Goal</a:t>
             </a:r>
             <a:endParaRPr lang="en-US" sz="1800" dirty="0"/>
           </a:p>
@@ -3386,7 +3997,53 @@
                 <a:ea typeface="Verdana" pitchFamily="34" charset="-122"/>
                 <a:cs typeface="Verdana" pitchFamily="34" charset="-120"/>
               </a:rPr>
-              <a:t>– An empty cardboard box, lid removed – An empty cup – A doorway or wide-open area – Drawing paper</a:t>
+              <a:t>Children notice </a:t>
+            </a:r>
+            <a:pPr algn="l" indent="0" marL="0">
+              <a:lnSpc>
+                <a:spcPts val="1680"/>
+              </a:lnSpc>
+              <a:spcBef>
+                <a:spcPts val="300"/>
+              </a:spcBef>
+              <a:spcAft>
+                <a:spcPts val="300"/>
+              </a:spcAft>
+              <a:buNone/>
+            </a:pPr>
+            <a:r>
+              <a:rPr lang="en-US" sz="1200" i="1" dirty="0">
+                <a:solidFill>
+                  <a:srgbClr val="2C2C2C"/>
+                </a:solidFill>
+                <a:latin typeface="Verdana" pitchFamily="34" charset="0"/>
+                <a:ea typeface="Verdana" pitchFamily="34" charset="-122"/>
+                <a:cs typeface="Verdana" pitchFamily="34" charset="-120"/>
+              </a:rPr>
+              <a:t>ākāśa</a:t>
+            </a:r>
+            <a:pPr algn="l" indent="0" marL="0">
+              <a:lnSpc>
+                <a:spcPts val="1680"/>
+              </a:lnSpc>
+              <a:spcBef>
+                <a:spcPts val="300"/>
+              </a:spcBef>
+              <a:spcAft>
+                <a:spcPts val="300"/>
+              </a:spcAft>
+              <a:buNone/>
+            </a:pPr>
+            <a:r>
+              <a:rPr lang="en-US" sz="1200" dirty="0">
+                <a:solidFill>
+                  <a:srgbClr val="2C2C2C"/>
+                </a:solidFill>
+                <a:latin typeface="Verdana" pitchFamily="34" charset="0"/>
+                <a:ea typeface="Verdana" pitchFamily="34" charset="-122"/>
+                <a:cs typeface="Verdana" pitchFamily="34" charset="-120"/>
+              </a:rPr>
+              <a:t> — the element that has no shape, colour, or smell — by exploring empty space.</a:t>
             </a:r>
             <a:endParaRPr lang="en-US" sz="1200" dirty="0"/>
           </a:p>
@@ -3544,7 +4201,7 @@
                 <a:ea typeface="Georgia" pitchFamily="34" charset="-122"/>
                 <a:cs typeface="Georgia" pitchFamily="34" charset="-120"/>
               </a:rPr>
-              <a:t>The flow</a:t>
+              <a:t>Materials</a:t>
             </a:r>
             <a:endParaRPr lang="en-US" sz="1800" dirty="0"/>
           </a:p>
@@ -3553,6 +4210,124 @@
       <p:sp>
         <p:nvSpPr>
           <p:cNvPr id="4" name="Text 2"/>
+          <p:cNvSpPr/>
+          <p:nvPr/>
+        </p:nvSpPr>
+        <p:spPr>
+          <a:xfrm>
+            <a:off x="634901" y="883593"/>
+            <a:ext cx="8102798" cy="1013222"/>
+          </a:xfrm>
+          <a:prstGeom prst="rect">
+            <a:avLst/>
+          </a:prstGeom>
+          <a:noFill/>
+          <a:ln/>
+        </p:spPr>
+        <p:txBody>
+          <a:bodyPr wrap="square" lIns="0" tIns="0" rIns="0" bIns="0" rtlCol="0" anchor="t"/>
+          <a:lstStyle/>
+          <a:p>
+            <a:pPr algn="l" marL="342900" indent="-342900">
+              <a:lnSpc>
+                <a:spcPts val="1620"/>
+              </a:lnSpc>
+              <a:spcAft>
+                <a:spcPts val="300"/>
+              </a:spcAft>
+              <a:buSzPct val="100000"/>
+              <a:buChar char="•"/>
+            </a:pPr>
+            <a:r>
+              <a:rPr lang="en-US" sz="1200" dirty="0">
+                <a:solidFill>
+                  <a:srgbClr val="2C2C2C"/>
+                </a:solidFill>
+                <a:latin typeface="Verdana" pitchFamily="34" charset="0"/>
+                <a:ea typeface="Verdana" pitchFamily="34" charset="-122"/>
+                <a:cs typeface="Verdana" pitchFamily="34" charset="-120"/>
+              </a:rPr>
+              <a:t>An empty cardboard box, lid removed</a:t>
+            </a:r>
+            <a:endParaRPr lang="en-US" sz="1200" dirty="0"/>
+          </a:p>
+          <a:p>
+            <a:pPr algn="l" marL="342900" indent="-342900">
+              <a:lnSpc>
+                <a:spcPts val="1620"/>
+              </a:lnSpc>
+              <a:spcAft>
+                <a:spcPts val="300"/>
+              </a:spcAft>
+              <a:buSzPct val="100000"/>
+              <a:buChar char="•"/>
+            </a:pPr>
+            <a:r>
+              <a:rPr lang="en-US" sz="1200" dirty="0">
+                <a:solidFill>
+                  <a:srgbClr val="2C2C2C"/>
+                </a:solidFill>
+                <a:latin typeface="Verdana" pitchFamily="34" charset="0"/>
+                <a:ea typeface="Verdana" pitchFamily="34" charset="-122"/>
+                <a:cs typeface="Verdana" pitchFamily="34" charset="-120"/>
+              </a:rPr>
+              <a:t>An empty cup</a:t>
+            </a:r>
+            <a:endParaRPr lang="en-US" sz="1200" dirty="0"/>
+          </a:p>
+          <a:p>
+            <a:pPr algn="l" marL="342900" indent="-342900">
+              <a:lnSpc>
+                <a:spcPts val="1620"/>
+              </a:lnSpc>
+              <a:spcAft>
+                <a:spcPts val="300"/>
+              </a:spcAft>
+              <a:buSzPct val="100000"/>
+              <a:buChar char="•"/>
+            </a:pPr>
+            <a:r>
+              <a:rPr lang="en-US" sz="1200" dirty="0">
+                <a:solidFill>
+                  <a:srgbClr val="2C2C2C"/>
+                </a:solidFill>
+                <a:latin typeface="Verdana" pitchFamily="34" charset="0"/>
+                <a:ea typeface="Verdana" pitchFamily="34" charset="-122"/>
+                <a:cs typeface="Verdana" pitchFamily="34" charset="-120"/>
+              </a:rPr>
+              <a:t>A doorway or wide-open area</a:t>
+            </a:r>
+            <a:endParaRPr lang="en-US" sz="1200" dirty="0"/>
+          </a:p>
+          <a:p>
+            <a:pPr algn="l" marL="342900" indent="-342900">
+              <a:lnSpc>
+                <a:spcPts val="1620"/>
+              </a:lnSpc>
+              <a:spcAft>
+                <a:spcPts val="300"/>
+              </a:spcAft>
+              <a:buSzPct val="100000"/>
+              <a:buChar char="•"/>
+            </a:pPr>
+            <a:r>
+              <a:rPr lang="en-US" sz="1200" dirty="0">
+                <a:solidFill>
+                  <a:srgbClr val="2C2C2C"/>
+                </a:solidFill>
+                <a:latin typeface="Verdana" pitchFamily="34" charset="0"/>
+                <a:ea typeface="Verdana" pitchFamily="34" charset="-122"/>
+                <a:cs typeface="Verdana" pitchFamily="34" charset="-120"/>
+              </a:rPr>
+              <a:t>Drawing paper</a:t>
+            </a:r>
+            <a:endParaRPr lang="en-US" sz="1200" dirty="0"/>
+          </a:p>
+        </p:txBody>
+      </p:sp>
+      <p:sp>
+        <p:nvSpPr>
+          <p:cNvPr id="5" name="Text 3"/>
           <p:cNvSpPr/>
           <p:nvPr/>
         </p:nvSpPr>
@@ -3702,7 +4477,7 @@
                 <a:ea typeface="Georgia" pitchFamily="34" charset="-122"/>
                 <a:cs typeface="Georgia" pitchFamily="34" charset="-120"/>
               </a:rPr>
-              <a:t>Settle + chant (5 min)</a:t>
+              <a:t>The flow</a:t>
             </a:r>
             <a:endParaRPr lang="en-US" sz="1800" dirty="0"/>
           </a:p>
@@ -3711,54 +4486,6 @@
       <p:sp>
         <p:nvSpPr>
           <p:cNvPr id="4" name="Text 2"/>
-          <p:cNvSpPr/>
-          <p:nvPr/>
-        </p:nvSpPr>
-        <p:spPr>
-          <a:xfrm>
-            <a:off x="406301" y="870942"/>
-            <a:ext cx="8498026" cy="213271"/>
-          </a:xfrm>
-          <a:prstGeom prst="rect">
-            <a:avLst/>
-          </a:prstGeom>
-          <a:noFill/>
-          <a:ln/>
-        </p:spPr>
-        <p:txBody>
-          <a:bodyPr wrap="square" lIns="0" tIns="0" rIns="0" bIns="0" rtlCol="0" anchor="t"/>
-          <a:lstStyle/>
-          <a:p>
-            <a:pPr algn="l" indent="0" marL="0">
-              <a:lnSpc>
-                <a:spcPts val="1680"/>
-              </a:lnSpc>
-              <a:spcBef>
-                <a:spcPts val="300"/>
-              </a:spcBef>
-              <a:spcAft>
-                <a:spcPts val="300"/>
-              </a:spcAft>
-              <a:buNone/>
-            </a:pPr>
-            <a:r>
-              <a:rPr lang="en-US" sz="1200" dirty="0">
-                <a:solidFill>
-                  <a:srgbClr val="2C2C2C"/>
-                </a:solidFill>
-                <a:latin typeface="Verdana" pitchFamily="34" charset="0"/>
-                <a:ea typeface="Verdana" pitchFamily="34" charset="-122"/>
-                <a:cs typeface="Verdana" pitchFamily="34" charset="-120"/>
-              </a:rPr>
-              <a:t>Daily chant. By now the chant should be fluid.</a:t>
-            </a:r>
-            <a:endParaRPr lang="en-US" sz="1200" dirty="0"/>
-          </a:p>
-        </p:txBody>
-      </p:sp>
-      <p:sp>
-        <p:nvSpPr>
-          <p:cNvPr id="5" name="Text 3"/>
           <p:cNvSpPr/>
           <p:nvPr/>
         </p:nvSpPr>
@@ -3908,7 +4635,7 @@
                 <a:ea typeface="Georgia" pitchFamily="34" charset="-122"/>
                 <a:cs typeface="Georgia" pitchFamily="34" charset="-120"/>
               </a:rPr>
-              <a:t>Story — recall (3 min)</a:t>
+              <a:t>Settle + chant (5 min)</a:t>
             </a:r>
             <a:endParaRPr lang="en-US" sz="1800" dirty="0"/>
           </a:p>
@@ -3923,7 +4650,7 @@
         <p:spPr>
           <a:xfrm>
             <a:off x="406301" y="870942"/>
-            <a:ext cx="8498026" cy="426541"/>
+            <a:ext cx="8498026" cy="213271"/>
           </a:xfrm>
           <a:prstGeom prst="rect">
             <a:avLst/>
@@ -3948,7 +4675,7 @@
               <a:buNone/>
             </a:pPr>
             <a:r>
-              <a:rPr lang="en-US" sz="1200" i="1" dirty="0">
+              <a:rPr lang="en-US" sz="1200" dirty="0">
                 <a:solidFill>
                   <a:srgbClr val="2C2C2C"/>
                 </a:solidFill>
@@ -3956,53 +4683,7 @@
                 <a:ea typeface="Verdana" pitchFamily="34" charset="-122"/>
                 <a:cs typeface="Verdana" pitchFamily="34" charset="-120"/>
               </a:rPr>
-              <a:t>"Who remembers all five friends?"</a:t>
-            </a:r>
-            <a:pPr algn="l" indent="0" marL="0">
-              <a:lnSpc>
-                <a:spcPts val="1680"/>
-              </a:lnSpc>
-              <a:spcBef>
-                <a:spcPts val="300"/>
-              </a:spcBef>
-              <a:spcAft>
-                <a:spcPts val="300"/>
-              </a:spcAft>
-              <a:buNone/>
-            </a:pPr>
-            <a:r>
-              <a:rPr lang="en-US" sz="1200" dirty="0">
-                <a:solidFill>
-                  <a:srgbClr val="2C2C2C"/>
-                </a:solidFill>
-                <a:latin typeface="Verdana" pitchFamily="34" charset="0"/>
-                <a:ea typeface="Verdana" pitchFamily="34" charset="-122"/>
-                <a:cs typeface="Verdana" pitchFamily="34" charset="-120"/>
-              </a:rPr>
-              <a:t> — chorus. </a:t>
-            </a:r>
-            <a:pPr algn="l" indent="0" marL="0">
-              <a:lnSpc>
-                <a:spcPts val="1680"/>
-              </a:lnSpc>
-              <a:spcBef>
-                <a:spcPts val="300"/>
-              </a:spcBef>
-              <a:spcAft>
-                <a:spcPts val="300"/>
-              </a:spcAft>
-              <a:buNone/>
-            </a:pPr>
-            <a:r>
-              <a:rPr lang="en-US" sz="1200" i="1" dirty="0">
-                <a:solidFill>
-                  <a:srgbClr val="2C2C2C"/>
-                </a:solidFill>
-                <a:latin typeface="Verdana" pitchFamily="34" charset="0"/>
-                <a:ea typeface="Verdana" pitchFamily="34" charset="-122"/>
-                <a:cs typeface="Verdana" pitchFamily="34" charset="-120"/>
-              </a:rPr>
-              <a:t>"Today: Ākāśa. She's the quietest friend. She doesn't have a shape. She doesn't have a colour. But she's the friend who lets everyone else exist."</a:t>
+              <a:t>Daily chant. By now the chant should be fluid.</a:t>
             </a:r>
             <a:endParaRPr lang="en-US" sz="1200" dirty="0"/>
           </a:p>
@@ -4160,7 +4841,7 @@
                 <a:ea typeface="Georgia" pitchFamily="34" charset="-122"/>
                 <a:cs typeface="Georgia" pitchFamily="34" charset="-120"/>
               </a:rPr>
-              <a:t>The Empty Box game (8 min)</a:t>
+              <a:t>Story — recall (3 min)</a:t>
             </a:r>
             <a:endParaRPr lang="en-US" sz="1800" dirty="0"/>
           </a:p>
@@ -4175,7 +4856,7 @@
         <p:spPr>
           <a:xfrm>
             <a:off x="406301" y="870942"/>
-            <a:ext cx="8498026" cy="213271"/>
+            <a:ext cx="8498026" cy="426541"/>
           </a:xfrm>
           <a:prstGeom prst="rect">
             <a:avLst/>
@@ -4200,7 +4881,7 @@
               <a:buNone/>
             </a:pPr>
             <a:r>
-              <a:rPr lang="en-US" sz="1200" dirty="0">
+              <a:rPr lang="en-US" sz="1200" i="1" dirty="0">
                 <a:solidFill>
                   <a:srgbClr val="2C2C2C"/>
                 </a:solidFill>
@@ -4208,7 +4889,7 @@
                 <a:ea typeface="Verdana" pitchFamily="34" charset="-122"/>
                 <a:cs typeface="Verdana" pitchFamily="34" charset="-120"/>
               </a:rPr>
-              <a:t>– Hold up the cardboard box, lid off. </a:t>
+              <a:t>"Who remembers all five friends?"</a:t>
             </a:r>
             <a:pPr algn="l" indent="0" marL="0">
               <a:lnSpc>
@@ -4223,7 +4904,7 @@
               <a:buNone/>
             </a:pPr>
             <a:r>
-              <a:rPr lang="en-US" sz="1200" i="1" dirty="0">
+              <a:rPr lang="en-US" sz="1200" dirty="0">
                 <a:solidFill>
                   <a:srgbClr val="2C2C2C"/>
                 </a:solidFill>
@@ -4231,7 +4912,7 @@
                 <a:ea typeface="Verdana" pitchFamily="34" charset="-122"/>
                 <a:cs typeface="Verdana" pitchFamily="34" charset="-120"/>
               </a:rPr>
-              <a:t>"What's in this box?"</a:t>
+              <a:t> — chorus. </a:t>
             </a:r>
             <a:pPr algn="l" indent="0" marL="0">
               <a:lnSpc>
@@ -4246,7 +4927,7 @@
               <a:buNone/>
             </a:pPr>
             <a:r>
-              <a:rPr lang="en-US" sz="1200" dirty="0">
+              <a:rPr lang="en-US" sz="1200" i="1" dirty="0">
                 <a:solidFill>
                   <a:srgbClr val="2C2C2C"/>
                 </a:solidFill>
@@ -4254,7 +4935,7 @@
                 <a:ea typeface="Verdana" pitchFamily="34" charset="-122"/>
                 <a:cs typeface="Verdana" pitchFamily="34" charset="-120"/>
               </a:rPr>
-              <a:t> – Children: "Nothing!" "Air!"</a:t>
+              <a:t>"Today: Ākāśa. She's the quietest friend. She doesn't have a shape. She doesn't have a colour. But she's the friend who lets everyone else exist."</a:t>
             </a:r>
             <a:endParaRPr lang="en-US" sz="1200" dirty="0"/>
           </a:p>
@@ -4263,169 +4944,6 @@
       <p:sp>
         <p:nvSpPr>
           <p:cNvPr id="5" name="Text 3"/>
-          <p:cNvSpPr/>
-          <p:nvPr/>
-        </p:nvSpPr>
-        <p:spPr>
-          <a:xfrm>
-            <a:off x="634901" y="1173063"/>
-            <a:ext cx="8102798" cy="487561"/>
-          </a:xfrm>
-          <a:prstGeom prst="rect">
-            <a:avLst/>
-          </a:prstGeom>
-          <a:noFill/>
-          <a:ln/>
-        </p:spPr>
-        <p:txBody>
-          <a:bodyPr wrap="square" lIns="0" tIns="0" rIns="0" bIns="0" rtlCol="0" anchor="t"/>
-          <a:lstStyle/>
-          <a:p>
-            <a:pPr algn="l" marL="342900" indent="-342900">
-              <a:lnSpc>
-                <a:spcPts val="1620"/>
-              </a:lnSpc>
-              <a:spcAft>
-                <a:spcPts val="300"/>
-              </a:spcAft>
-              <a:buSzPct val="100000"/>
-              <a:buChar char="•"/>
-            </a:pPr>
-            <a:r>
-              <a:rPr lang="en-US" sz="1200" i="1" dirty="0">
-                <a:solidFill>
-                  <a:srgbClr val="2C2C2C"/>
-                </a:solidFill>
-                <a:latin typeface="Verdana" pitchFamily="34" charset="0"/>
-                <a:ea typeface="Verdana" pitchFamily="34" charset="-122"/>
-                <a:cs typeface="Verdana" pitchFamily="34" charset="-120"/>
-              </a:rPr>
-              <a:t>"You're right that there's air — but there's also something else. The SPACE inside the box. The room. The gap. That's Ākāśa."</a:t>
-            </a:r>
-            <a:endParaRPr lang="en-US" sz="1200" dirty="0"/>
-          </a:p>
-        </p:txBody>
-      </p:sp>
-      <p:sp>
-        <p:nvSpPr>
-          <p:cNvPr id="6" name="Text 4"/>
-          <p:cNvSpPr/>
-          <p:nvPr/>
-        </p:nvSpPr>
-        <p:spPr>
-          <a:xfrm>
-            <a:off x="406301" y="1749475"/>
-            <a:ext cx="8498026" cy="213271"/>
-          </a:xfrm>
-          <a:prstGeom prst="rect">
-            <a:avLst/>
-          </a:prstGeom>
-          <a:noFill/>
-          <a:ln/>
-        </p:spPr>
-        <p:txBody>
-          <a:bodyPr wrap="square" lIns="0" tIns="0" rIns="0" bIns="0" rtlCol="0" anchor="t"/>
-          <a:lstStyle/>
-          <a:p>
-            <a:pPr algn="l" indent="0" marL="0">
-              <a:lnSpc>
-                <a:spcPts val="1680"/>
-              </a:lnSpc>
-              <a:spcBef>
-                <a:spcPts val="300"/>
-              </a:spcBef>
-              <a:spcAft>
-                <a:spcPts val="300"/>
-              </a:spcAft>
-              <a:buNone/>
-            </a:pPr>
-            <a:r>
-              <a:rPr lang="en-US" sz="1200" dirty="0">
-                <a:solidFill>
-                  <a:srgbClr val="2C2C2C"/>
-                </a:solidFill>
-                <a:latin typeface="Verdana" pitchFamily="34" charset="0"/>
-                <a:ea typeface="Verdana" pitchFamily="34" charset="-122"/>
-                <a:cs typeface="Verdana" pitchFamily="34" charset="-120"/>
-              </a:rPr>
-              <a:t>– Pass the box around. Each child holds it and looks INSIDE the box. </a:t>
-            </a:r>
-            <a:pPr algn="l" indent="0" marL="0">
-              <a:lnSpc>
-                <a:spcPts val="1680"/>
-              </a:lnSpc>
-              <a:spcBef>
-                <a:spcPts val="300"/>
-              </a:spcBef>
-              <a:spcAft>
-                <a:spcPts val="300"/>
-              </a:spcAft>
-              <a:buNone/>
-            </a:pPr>
-            <a:r>
-              <a:rPr lang="en-US" sz="1200" i="1" dirty="0">
-                <a:solidFill>
-                  <a:srgbClr val="2C2C2C"/>
-                </a:solidFill>
-                <a:latin typeface="Verdana" pitchFamily="34" charset="0"/>
-                <a:ea typeface="Verdana" pitchFamily="34" charset="-122"/>
-                <a:cs typeface="Verdana" pitchFamily="34" charset="-120"/>
-              </a:rPr>
-              <a:t>"What do you see?"</a:t>
-            </a:r>
-            <a:endParaRPr lang="en-US" sz="1200" dirty="0"/>
-          </a:p>
-        </p:txBody>
-      </p:sp>
-      <p:sp>
-        <p:nvSpPr>
-          <p:cNvPr id="7" name="Text 5"/>
-          <p:cNvSpPr/>
-          <p:nvPr/>
-        </p:nvSpPr>
-        <p:spPr>
-          <a:xfrm>
-            <a:off x="634901" y="2051596"/>
-            <a:ext cx="8102798" cy="281880"/>
-          </a:xfrm>
-          <a:prstGeom prst="rect">
-            <a:avLst/>
-          </a:prstGeom>
-          <a:noFill/>
-          <a:ln/>
-        </p:spPr>
-        <p:txBody>
-          <a:bodyPr wrap="square" lIns="0" tIns="0" rIns="0" bIns="0" rtlCol="0" anchor="t"/>
-          <a:lstStyle/>
-          <a:p>
-            <a:pPr algn="l" marL="342900" indent="-342900">
-              <a:lnSpc>
-                <a:spcPts val="1620"/>
-              </a:lnSpc>
-              <a:spcAft>
-                <a:spcPts val="300"/>
-              </a:spcAft>
-              <a:buSzPct val="100000"/>
-              <a:buChar char="•"/>
-            </a:pPr>
-            <a:r>
-              <a:rPr lang="en-US" sz="1200" i="1" dirty="0">
-                <a:solidFill>
-                  <a:srgbClr val="2C2C2C"/>
-                </a:solidFill>
-                <a:latin typeface="Verdana" pitchFamily="34" charset="0"/>
-                <a:ea typeface="Verdana" pitchFamily="34" charset="-122"/>
-                <a:cs typeface="Verdana" pitchFamily="34" charset="-120"/>
-              </a:rPr>
-              <a:t>"Now look at this cup. The cup is Pṛthvī. The inside of the cup, where the tea will go — that's Ākāśa."</a:t>
-            </a:r>
-            <a:endParaRPr lang="en-US" sz="1200" dirty="0"/>
-          </a:p>
-        </p:txBody>
-      </p:sp>
-      <p:sp>
-        <p:nvSpPr>
-          <p:cNvPr id="8" name="Text 6"/>
           <p:cNvSpPr/>
           <p:nvPr/>
         </p:nvSpPr>
@@ -4575,7 +5093,7 @@
                 <a:ea typeface="Georgia" pitchFamily="34" charset="-122"/>
                 <a:cs typeface="Georgia" pitchFamily="34" charset="-120"/>
               </a:rPr>
-              <a:t>Notice game (7 min)</a:t>
+              <a:t>The Empty Box game (8 min)</a:t>
             </a:r>
             <a:endParaRPr lang="en-US" sz="1800" dirty="0"/>
           </a:p>
@@ -4589,8 +5107,8 @@
         </p:nvSpPr>
         <p:spPr>
           <a:xfrm>
-            <a:off x="406301" y="870942"/>
-            <a:ext cx="8498026" cy="213271"/>
+            <a:off x="634901" y="883593"/>
+            <a:ext cx="8102798" cy="1218902"/>
           </a:xfrm>
           <a:prstGeom prst="rect">
             <a:avLst/>
@@ -4602,17 +5120,15 @@
           <a:bodyPr wrap="square" lIns="0" tIns="0" rIns="0" bIns="0" rtlCol="0" anchor="t"/>
           <a:lstStyle/>
           <a:p>
-            <a:pPr algn="l" indent="0" marL="0">
-              <a:lnSpc>
-                <a:spcPts val="1680"/>
-              </a:lnSpc>
-              <a:spcBef>
-                <a:spcPts val="300"/>
-              </a:spcBef>
-              <a:spcAft>
-                <a:spcPts val="300"/>
-              </a:spcAft>
-              <a:buNone/>
+            <a:pPr algn="l" marL="342900" indent="-342900">
+              <a:lnSpc>
+                <a:spcPts val="1620"/>
+              </a:lnSpc>
+              <a:spcAft>
+                <a:spcPts val="300"/>
+              </a:spcAft>
+              <a:buSzPct val="100000"/>
+              <a:buChar char="•"/>
             </a:pPr>
             <a:r>
               <a:rPr lang="en-US" sz="1200" dirty="0">
@@ -4623,42 +5139,16 @@
                 <a:ea typeface="Verdana" pitchFamily="34" charset="-122"/>
                 <a:cs typeface="Verdana" pitchFamily="34" charset="-120"/>
               </a:rPr>
-              <a:t>– Children stand up.</a:t>
-            </a:r>
-            <a:endParaRPr lang="en-US" sz="1200" dirty="0"/>
-          </a:p>
-        </p:txBody>
-      </p:sp>
-      <p:sp>
-        <p:nvSpPr>
-          <p:cNvPr id="5" name="Text 3"/>
-          <p:cNvSpPr/>
-          <p:nvPr/>
-        </p:nvSpPr>
-        <p:spPr>
-          <a:xfrm>
-            <a:off x="634901" y="1173063"/>
-            <a:ext cx="8102798" cy="1013222"/>
-          </a:xfrm>
-          <a:prstGeom prst="rect">
-            <a:avLst/>
-          </a:prstGeom>
-          <a:noFill/>
-          <a:ln/>
-        </p:spPr>
-        <p:txBody>
-          <a:bodyPr wrap="square" lIns="0" tIns="0" rIns="0" bIns="0" rtlCol="0" anchor="t"/>
-          <a:lstStyle/>
-          <a:p>
-            <a:pPr algn="l" marL="342900" indent="-342900">
+              <a:t>Hold up the cardboard box, lid off. </a:t>
+            </a:r>
+            <a:pPr algn="l" indent="0" marL="0">
               <a:lnSpc>
                 <a:spcPts val="1620"/>
               </a:lnSpc>
               <a:spcAft>
                 <a:spcPts val="300"/>
               </a:spcAft>
-              <a:buSzPct val="100000"/>
-              <a:buChar char="•"/>
+              <a:buNone/>
             </a:pPr>
             <a:r>
               <a:rPr lang="en-US" sz="1200" i="1" dirty="0">
@@ -4669,7 +5159,7 @@
                 <a:ea typeface="Verdana" pitchFamily="34" charset="-122"/>
                 <a:cs typeface="Verdana" pitchFamily="34" charset="-120"/>
               </a:rPr>
-              <a:t>"Hold your arms out. The gap between your arms — that's Ākāśa."</a:t>
+              <a:t>"What's in this box?"</a:t>
             </a:r>
             <a:endParaRPr lang="en-US" sz="1200" dirty="0"/>
           </a:p>
@@ -4685,7 +5175,7 @@
               <a:buChar char="•"/>
             </a:pPr>
             <a:r>
-              <a:rPr lang="en-US" sz="1200" i="1" dirty="0">
+              <a:rPr lang="en-US" sz="1200" dirty="0">
                 <a:solidFill>
                   <a:srgbClr val="2C2C2C"/>
                 </a:solidFill>
@@ -4693,7 +5183,7 @@
                 <a:ea typeface="Verdana" pitchFamily="34" charset="-122"/>
                 <a:cs typeface="Verdana" pitchFamily="34" charset="-120"/>
               </a:rPr>
-              <a:t>"Look between you and the person next to you. That gap — that's Ākāśa."</a:t>
+              <a:t>Children: "Nothing!" "Air!"</a:t>
             </a:r>
             <a:endParaRPr lang="en-US" sz="1200" dirty="0"/>
           </a:p>
@@ -4717,7 +5207,7 @@
                 <a:ea typeface="Verdana" pitchFamily="34" charset="-122"/>
                 <a:cs typeface="Verdana" pitchFamily="34" charset="-120"/>
               </a:rPr>
-              <a:t>"Look up at the ceiling. The gap between your head and the ceiling — that's Ākāśa."</a:t>
+              <a:t>"You're right that there's air — but there's also something else. The SPACE inside the box. The room. The gap. That's Ākāśa."</a:t>
             </a:r>
             <a:endParaRPr lang="en-US" sz="1200" dirty="0"/>
           </a:p>
@@ -4733,7 +5223,7 @@
               <a:buChar char="•"/>
             </a:pPr>
             <a:r>
-              <a:rPr lang="en-US" sz="1200" i="1" dirty="0">
+              <a:rPr lang="en-US" sz="1200" dirty="0">
                 <a:solidFill>
                   <a:srgbClr val="2C2C2C"/>
                 </a:solidFill>
@@ -4741,7 +5231,27 @@
                 <a:ea typeface="Verdana" pitchFamily="34" charset="-122"/>
                 <a:cs typeface="Verdana" pitchFamily="34" charset="-120"/>
               </a:rPr>
-              <a:t>"Ākāśa is everywhere there's room for something else to be."</a:t>
+              <a:t>Pass the box around. Each child holds it and looks INSIDE the box. </a:t>
+            </a:r>
+            <a:pPr algn="l" indent="0" marL="0">
+              <a:lnSpc>
+                <a:spcPts val="1620"/>
+              </a:lnSpc>
+              <a:spcAft>
+                <a:spcPts val="300"/>
+              </a:spcAft>
+              <a:buNone/>
+            </a:pPr>
+            <a:r>
+              <a:rPr lang="en-US" sz="1200" i="1" dirty="0">
+                <a:solidFill>
+                  <a:srgbClr val="2C2C2C"/>
+                </a:solidFill>
+                <a:latin typeface="Verdana" pitchFamily="34" charset="0"/>
+                <a:ea typeface="Verdana" pitchFamily="34" charset="-122"/>
+                <a:cs typeface="Verdana" pitchFamily="34" charset="-120"/>
+              </a:rPr>
+              <a:t>"What do you see?"</a:t>
             </a:r>
             <a:endParaRPr lang="en-US" sz="1200" dirty="0"/>
           </a:p>
@@ -4749,7 +5259,7 @@
       </p:sp>
       <p:sp>
         <p:nvSpPr>
-          <p:cNvPr id="6" name="Text 4"/>
+          <p:cNvPr id="5" name="Text 3"/>
           <p:cNvSpPr/>
           <p:nvPr/>
         </p:nvSpPr>
@@ -4899,7 +5409,7 @@
                 <a:ea typeface="Georgia" pitchFamily="34" charset="-122"/>
                 <a:cs typeface="Georgia" pitchFamily="34" charset="-120"/>
               </a:rPr>
-              <a:t>Sound demonstration (5 min)</a:t>
+              <a:t>The Empty Box game (8 min) (cont.)</a:t>
             </a:r>
             <a:endParaRPr lang="en-US" sz="1800" dirty="0"/>
           </a:p>
@@ -4945,7 +5455,7 @@
                 <a:ea typeface="Verdana" pitchFamily="34" charset="-122"/>
                 <a:cs typeface="Verdana" pitchFamily="34" charset="-120"/>
               </a:rPr>
-              <a:t>"Ākāśa has one special thing — sound travels through it."</a:t>
+              <a:t>"Now look at this cup. The cup is Pṛthvī. The inside of the cup, where the tea will go — that's Ākāśa."</a:t>
             </a:r>
             <a:endParaRPr lang="en-US" sz="1200" dirty="0"/>
           </a:p>
@@ -4954,203 +5464,6 @@
       <p:sp>
         <p:nvSpPr>
           <p:cNvPr id="5" name="Text 3"/>
-          <p:cNvSpPr/>
-          <p:nvPr/>
-        </p:nvSpPr>
-        <p:spPr>
-          <a:xfrm>
-            <a:off x="406301" y="1254323"/>
-            <a:ext cx="8498026" cy="213271"/>
-          </a:xfrm>
-          <a:prstGeom prst="rect">
-            <a:avLst/>
-          </a:prstGeom>
-          <a:noFill/>
-          <a:ln/>
-        </p:spPr>
-        <p:txBody>
-          <a:bodyPr wrap="square" lIns="0" tIns="0" rIns="0" bIns="0" rtlCol="0" anchor="t"/>
-          <a:lstStyle/>
-          <a:p>
-            <a:pPr algn="l" indent="0" marL="0">
-              <a:lnSpc>
-                <a:spcPts val="1680"/>
-              </a:lnSpc>
-              <a:spcBef>
-                <a:spcPts val="300"/>
-              </a:spcBef>
-              <a:spcAft>
-                <a:spcPts val="300"/>
-              </a:spcAft>
-              <a:buNone/>
-            </a:pPr>
-            <a:r>
-              <a:rPr lang="en-US" sz="1200" dirty="0">
-                <a:solidFill>
-                  <a:srgbClr val="2C2C2C"/>
-                </a:solidFill>
-                <a:latin typeface="Verdana" pitchFamily="34" charset="0"/>
-                <a:ea typeface="Verdana" pitchFamily="34" charset="-122"/>
-                <a:cs typeface="Verdana" pitchFamily="34" charset="-120"/>
-              </a:rPr>
-              <a:t>– Clap once, loudly. </a:t>
-            </a:r>
-            <a:pPr algn="l" indent="0" marL="0">
-              <a:lnSpc>
-                <a:spcPts val="1680"/>
-              </a:lnSpc>
-              <a:spcBef>
-                <a:spcPts val="300"/>
-              </a:spcBef>
-              <a:spcAft>
-                <a:spcPts val="300"/>
-              </a:spcAft>
-              <a:buNone/>
-            </a:pPr>
-            <a:r>
-              <a:rPr lang="en-US" sz="1200" i="1" dirty="0">
-                <a:solidFill>
-                  <a:srgbClr val="2C2C2C"/>
-                </a:solidFill>
-                <a:latin typeface="Verdana" pitchFamily="34" charset="0"/>
-                <a:ea typeface="Verdana" pitchFamily="34" charset="-122"/>
-                <a:cs typeface="Verdana" pitchFamily="34" charset="-120"/>
-              </a:rPr>
-              <a:t>"That clap travelled through Ākāśa to your ears."</a:t>
-            </a:r>
-            <a:endParaRPr lang="en-US" sz="1200" dirty="0"/>
-          </a:p>
-        </p:txBody>
-      </p:sp>
-      <p:sp>
-        <p:nvSpPr>
-          <p:cNvPr id="6" name="Text 4"/>
-          <p:cNvSpPr/>
-          <p:nvPr/>
-        </p:nvSpPr>
-        <p:spPr>
-          <a:xfrm>
-            <a:off x="634901" y="1556445"/>
-            <a:ext cx="8102798" cy="281880"/>
-          </a:xfrm>
-          <a:prstGeom prst="rect">
-            <a:avLst/>
-          </a:prstGeom>
-          <a:noFill/>
-          <a:ln/>
-        </p:spPr>
-        <p:txBody>
-          <a:bodyPr wrap="square" lIns="0" tIns="0" rIns="0" bIns="0" rtlCol="0" anchor="t"/>
-          <a:lstStyle/>
-          <a:p>
-            <a:pPr algn="l" marL="342900" indent="-342900">
-              <a:lnSpc>
-                <a:spcPts val="1620"/>
-              </a:lnSpc>
-              <a:spcAft>
-                <a:spcPts val="300"/>
-              </a:spcAft>
-              <a:buSzPct val="100000"/>
-              <a:buChar char="•"/>
-            </a:pPr>
-            <a:r>
-              <a:rPr lang="en-US" sz="1200" i="1" dirty="0">
-                <a:solidFill>
-                  <a:srgbClr val="2C2C2C"/>
-                </a:solidFill>
-                <a:latin typeface="Verdana" pitchFamily="34" charset="0"/>
-                <a:ea typeface="Verdana" pitchFamily="34" charset="-122"/>
-                <a:cs typeface="Verdana" pitchFamily="34" charset="-120"/>
-              </a:rPr>
-              <a:t>"That's why old Indian thinkers said Ākāśa's quality is </a:t>
-            </a:r>
-            <a:pPr algn="l" indent="0" marL="0">
-              <a:lnSpc>
-                <a:spcPts val="1620"/>
-              </a:lnSpc>
-              <a:spcAft>
-                <a:spcPts val="300"/>
-              </a:spcAft>
-              <a:buNone/>
-            </a:pPr>
-            <a:r>
-              <a:rPr lang="en-US" sz="1200" b="1" i="1" dirty="0">
-                <a:solidFill>
-                  <a:srgbClr val="2C2C2C"/>
-                </a:solidFill>
-                <a:latin typeface="Verdana" pitchFamily="34" charset="0"/>
-                <a:ea typeface="Verdana" pitchFamily="34" charset="-122"/>
-                <a:cs typeface="Verdana" pitchFamily="34" charset="-120"/>
-              </a:rPr>
-              <a:t>sound</a:t>
-            </a:r>
-            <a:pPr algn="l" indent="0" marL="0">
-              <a:lnSpc>
-                <a:spcPts val="1620"/>
-              </a:lnSpc>
-              <a:spcAft>
-                <a:spcPts val="300"/>
-              </a:spcAft>
-              <a:buNone/>
-            </a:pPr>
-            <a:r>
-              <a:rPr lang="en-US" sz="1200" i="1" dirty="0">
-                <a:solidFill>
-                  <a:srgbClr val="2C2C2C"/>
-                </a:solidFill>
-                <a:latin typeface="Verdana" pitchFamily="34" charset="0"/>
-                <a:ea typeface="Verdana" pitchFamily="34" charset="-122"/>
-                <a:cs typeface="Verdana" pitchFamily="34" charset="-120"/>
-              </a:rPr>
-              <a:t> (</a:t>
-            </a:r>
-            <a:pPr algn="l" indent="0" marL="0">
-              <a:lnSpc>
-                <a:spcPts val="1620"/>
-              </a:lnSpc>
-              <a:spcAft>
-                <a:spcPts val="300"/>
-              </a:spcAft>
-              <a:buNone/>
-            </a:pPr>
-            <a:r>
-              <a:rPr lang="en-US" sz="1200" dirty="0">
-                <a:solidFill>
-                  <a:srgbClr val="2C2C2C"/>
-                </a:solidFill>
-                <a:latin typeface="Verdana" pitchFamily="34" charset="0"/>
-                <a:ea typeface="Verdana" pitchFamily="34" charset="-122"/>
-                <a:cs typeface="Verdana" pitchFamily="34" charset="-120"/>
-              </a:rPr>
-              <a:t>śabda</a:t>
-            </a:r>
-            <a:pPr algn="l" indent="0" marL="0">
-              <a:lnSpc>
-                <a:spcPts val="1620"/>
-              </a:lnSpc>
-              <a:spcAft>
-                <a:spcPts val="300"/>
-              </a:spcAft>
-              <a:buNone/>
-            </a:pPr>
-            <a:r>
-              <a:rPr lang="en-US" sz="1200" i="1" dirty="0">
-                <a:solidFill>
-                  <a:srgbClr val="2C2C2C"/>
-                </a:solidFill>
-                <a:latin typeface="Verdana" pitchFamily="34" charset="0"/>
-                <a:ea typeface="Verdana" pitchFamily="34" charset="-122"/>
-                <a:cs typeface="Verdana" pitchFamily="34" charset="-120"/>
-              </a:rPr>
-              <a:t>)."</a:t>
-            </a:r>
-            <a:endParaRPr lang="en-US" sz="1200" dirty="0"/>
-          </a:p>
-        </p:txBody>
-      </p:sp>
-      <p:sp>
-        <p:nvSpPr>
-          <p:cNvPr id="7" name="Text 5"/>
           <p:cNvSpPr/>
           <p:nvPr/>
         </p:nvSpPr>
@@ -5300,7 +5613,7 @@
                 <a:ea typeface="Georgia" pitchFamily="34" charset="-122"/>
                 <a:cs typeface="Georgia" pitchFamily="34" charset="-120"/>
               </a:rPr>
-              <a:t>Draw (5 min)</a:t>
+              <a:t>Notice game (7 min)</a:t>
             </a:r>
             <a:endParaRPr lang="en-US" sz="1800" dirty="0"/>
           </a:p>
@@ -5314,8 +5627,8 @@
         </p:nvSpPr>
         <p:spPr>
           <a:xfrm>
-            <a:off x="406301" y="870942"/>
-            <a:ext cx="8498026" cy="426541"/>
+            <a:off x="634901" y="883593"/>
+            <a:ext cx="8102798" cy="1257002"/>
           </a:xfrm>
           <a:prstGeom prst="rect">
             <a:avLst/>
@@ -5327,17 +5640,15 @@
           <a:bodyPr wrap="square" lIns="0" tIns="0" rIns="0" bIns="0" rtlCol="0" anchor="t"/>
           <a:lstStyle/>
           <a:p>
-            <a:pPr algn="l" indent="0" marL="0">
-              <a:lnSpc>
-                <a:spcPts val="1680"/>
-              </a:lnSpc>
-              <a:spcBef>
-                <a:spcPts val="300"/>
-              </a:spcBef>
-              <a:spcAft>
-                <a:spcPts val="300"/>
-              </a:spcAft>
-              <a:buNone/>
+            <a:pPr algn="l" marL="342900" indent="-342900">
+              <a:lnSpc>
+                <a:spcPts val="1620"/>
+              </a:lnSpc>
+              <a:spcAft>
+                <a:spcPts val="300"/>
+              </a:spcAft>
+              <a:buSzPct val="100000"/>
+              <a:buChar char="•"/>
             </a:pPr>
             <a:r>
               <a:rPr lang="en-US" sz="1200" dirty="0">
@@ -5348,7 +5659,103 @@
                 <a:ea typeface="Verdana" pitchFamily="34" charset="-122"/>
                 <a:cs typeface="Verdana" pitchFamily="34" charset="-120"/>
               </a:rPr>
-              <a:t>Each child draws a place at home where they notice Ākāśa most. (The space under their bed? The empty room when no one's there? The sky?)</a:t>
+              <a:t>Children stand up.</a:t>
+            </a:r>
+            <a:endParaRPr lang="en-US" sz="1200" dirty="0"/>
+          </a:p>
+          <a:p>
+            <a:pPr algn="l" marL="342900" indent="-342900">
+              <a:lnSpc>
+                <a:spcPts val="1620"/>
+              </a:lnSpc>
+              <a:spcAft>
+                <a:spcPts val="300"/>
+              </a:spcAft>
+              <a:buSzPct val="100000"/>
+              <a:buChar char="•"/>
+            </a:pPr>
+            <a:r>
+              <a:rPr lang="en-US" sz="1200" i="1" dirty="0">
+                <a:solidFill>
+                  <a:srgbClr val="2C2C2C"/>
+                </a:solidFill>
+                <a:latin typeface="Verdana" pitchFamily="34" charset="0"/>
+                <a:ea typeface="Verdana" pitchFamily="34" charset="-122"/>
+                <a:cs typeface="Verdana" pitchFamily="34" charset="-120"/>
+              </a:rPr>
+              <a:t>"Hold your arms out. The gap between your arms — that's Ākāśa."</a:t>
+            </a:r>
+            <a:endParaRPr lang="en-US" sz="1200" dirty="0"/>
+          </a:p>
+          <a:p>
+            <a:pPr algn="l" marL="342900" indent="-342900">
+              <a:lnSpc>
+                <a:spcPts val="1620"/>
+              </a:lnSpc>
+              <a:spcAft>
+                <a:spcPts val="300"/>
+              </a:spcAft>
+              <a:buSzPct val="100000"/>
+              <a:buChar char="•"/>
+            </a:pPr>
+            <a:r>
+              <a:rPr lang="en-US" sz="1200" i="1" dirty="0">
+                <a:solidFill>
+                  <a:srgbClr val="2C2C2C"/>
+                </a:solidFill>
+                <a:latin typeface="Verdana" pitchFamily="34" charset="0"/>
+                <a:ea typeface="Verdana" pitchFamily="34" charset="-122"/>
+                <a:cs typeface="Verdana" pitchFamily="34" charset="-120"/>
+              </a:rPr>
+              <a:t>"Look between you and the person next to you. That gap — that's Ākāśa."</a:t>
+            </a:r>
+            <a:endParaRPr lang="en-US" sz="1200" dirty="0"/>
+          </a:p>
+          <a:p>
+            <a:pPr algn="l" marL="342900" indent="-342900">
+              <a:lnSpc>
+                <a:spcPts val="1620"/>
+              </a:lnSpc>
+              <a:spcAft>
+                <a:spcPts val="300"/>
+              </a:spcAft>
+              <a:buSzPct val="100000"/>
+              <a:buChar char="•"/>
+            </a:pPr>
+            <a:r>
+              <a:rPr lang="en-US" sz="1200" i="1" dirty="0">
+                <a:solidFill>
+                  <a:srgbClr val="2C2C2C"/>
+                </a:solidFill>
+                <a:latin typeface="Verdana" pitchFamily="34" charset="0"/>
+                <a:ea typeface="Verdana" pitchFamily="34" charset="-122"/>
+                <a:cs typeface="Verdana" pitchFamily="34" charset="-120"/>
+              </a:rPr>
+              <a:t>"Look up at the ceiling. The gap between your head and the ceiling — that's Ākāśa."</a:t>
+            </a:r>
+            <a:endParaRPr lang="en-US" sz="1200" dirty="0"/>
+          </a:p>
+          <a:p>
+            <a:pPr algn="l" marL="342900" indent="-342900">
+              <a:lnSpc>
+                <a:spcPts val="1620"/>
+              </a:lnSpc>
+              <a:spcAft>
+                <a:spcPts val="300"/>
+              </a:spcAft>
+              <a:buSzPct val="100000"/>
+              <a:buChar char="•"/>
+            </a:pPr>
+            <a:r>
+              <a:rPr lang="en-US" sz="1200" i="1" dirty="0">
+                <a:solidFill>
+                  <a:srgbClr val="2C2C2C"/>
+                </a:solidFill>
+                <a:latin typeface="Verdana" pitchFamily="34" charset="0"/>
+                <a:ea typeface="Verdana" pitchFamily="34" charset="-122"/>
+                <a:cs typeface="Verdana" pitchFamily="34" charset="-120"/>
+              </a:rPr>
+              <a:t>"Ākāśa is everywhere there's room for something else to be."</a:t>
             </a:r>
             <a:endParaRPr lang="en-US" sz="1200" dirty="0"/>
           </a:p>
